--- a/2026-04-14 - PSCustomObject[] vs Hashtables/PowerShell Summit 2026 - PSCustomObjects vs Hashtables.pptx
+++ b/2026-04-14 - PSCustomObject[] vs Hashtables/PowerShell Summit 2026 - PSCustomObjects vs Hashtables.pptx
@@ -247,7 +247,7 @@
           <a:p>
             <a:fld id="{71DD7AA7-6947-46DE-8F8D-972DE75C4888}" type="datetimeFigureOut">
               <a:rPr lang="en-US" smtClean="0"/>
-              <a:t>4/10/2026</a:t>
+              <a:t>4/12/2026</a:t>
             </a:fld>
             <a:endParaRPr lang="en-US"/>
           </a:p>
@@ -13882,7 +13882,7 @@
         <p:spPr>
           <a:xfrm>
             <a:off x="1256362" y="1361260"/>
-            <a:ext cx="5205984" cy="4135480"/>
+            <a:ext cx="5469876" cy="4135480"/>
           </a:xfrm>
         </p:spPr>
         <p:txBody>
@@ -13906,7 +13906,7 @@
                   <a:schemeClr val="tx1"/>
                 </a:solidFill>
               </a:rPr>
-              <a:t>Natural Intelligence hosted on human hardware</a:t>
+              <a:t>Cadillac of a son-in-law</a:t>
             </a:r>
           </a:p>
           <a:p>
@@ -13939,7 +13939,18 @@
                   <a:schemeClr val="tx1"/>
                 </a:solidFill>
               </a:rPr>
-              <a:t>Cloud Platform Architect</a:t>
+              <a:t>Employed:</a:t>
+            </a:r>
+          </a:p>
+          <a:p>
+            <a:pPr lvl="2"/>
+            <a:r>
+              <a:rPr lang="en-US" sz="2400" dirty="0">
+                <a:solidFill>
+                  <a:schemeClr val="tx1"/>
+                </a:solidFill>
+              </a:rPr>
+              <a:t>Chat online with my friends all days and sometimes run meetings.</a:t>
             </a:r>
           </a:p>
         </p:txBody>
@@ -14291,6 +14302,37 @@
                                           <p:spTgt spid="4">
                                             <p:txEl>
                                               <p:pRg st="4" end="4"/>
+                                            </p:txEl>
+                                          </p:spTgt>
+                                        </p:tgtEl>
+                                        <p:attrNameLst>
+                                          <p:attrName>style.visibility</p:attrName>
+                                        </p:attrNameLst>
+                                      </p:cBhvr>
+                                      <p:to>
+                                        <p:strVal val="visible"/>
+                                      </p:to>
+                                    </p:set>
+                                  </p:childTnLst>
+                                </p:cTn>
+                              </p:par>
+                              <p:par>
+                                <p:cTn id="23" presetID="1" presetClass="entr" presetSubtype="0" fill="hold" grpId="0" nodeType="withEffect">
+                                  <p:stCondLst>
+                                    <p:cond delay="0"/>
+                                  </p:stCondLst>
+                                  <p:childTnLst>
+                                    <p:set>
+                                      <p:cBhvr>
+                                        <p:cTn id="24" dur="1" fill="hold">
+                                          <p:stCondLst>
+                                            <p:cond delay="0"/>
+                                          </p:stCondLst>
+                                        </p:cTn>
+                                        <p:tgtEl>
+                                          <p:spTgt spid="4">
+                                            <p:txEl>
+                                              <p:pRg st="5" end="5"/>
                                             </p:txEl>
                                           </p:spTgt>
                                         </p:tgtEl>
@@ -15685,6 +15727,17 @@
 </file>
 
 <file path=customXml/item1.xml><?xml version="1.0" encoding="utf-8"?>
+<p:properties xmlns:p="http://schemas.microsoft.com/office/2006/metadata/properties" xmlns:xsi="http://www.w3.org/2001/XMLSchema-instance" xmlns:pc="http://schemas.microsoft.com/office/infopath/2007/PartnerControls">
+  <documentManagement>
+    <TaxCatchAll xmlns="ca649edd-3005-4233-a3e7-8a8d225fe916" xsi:nil="true"/>
+    <lcf76f155ced4ddcb4097134ff3c332f xmlns="5716c540-f2cb-4866-ac44-22c3da4c8498">
+      <Terms xmlns="http://schemas.microsoft.com/office/infopath/2007/PartnerControls"/>
+    </lcf76f155ced4ddcb4097134ff3c332f>
+  </documentManagement>
+</p:properties>
+</file>
+
+<file path=customXml/item2.xml><?xml version="1.0" encoding="utf-8"?>
 <ct:contentTypeSchema xmlns:ct="http://schemas.microsoft.com/office/2006/metadata/contentType" xmlns:ma="http://schemas.microsoft.com/office/2006/metadata/properties/metaAttributes" ct:_="" ma:_="" ma:contentTypeName="Document" ma:contentTypeID="0x010100C0898A77C9D58B48B3D389FB6B71E66B" ma:contentTypeVersion="17" ma:contentTypeDescription="Create a new document." ma:contentTypeScope="" ma:versionID="efacb11f427cb0a88b245a21667b355e">
   <xsd:schema xmlns:xsd="http://www.w3.org/2001/XMLSchema" xmlns:xs="http://www.w3.org/2001/XMLSchema" xmlns:p="http://schemas.microsoft.com/office/2006/metadata/properties" xmlns:ns2="ca649edd-3005-4233-a3e7-8a8d225fe916" xmlns:ns3="5716c540-f2cb-4866-ac44-22c3da4c8498" targetNamespace="http://schemas.microsoft.com/office/2006/metadata/properties" ma:root="true" ma:fieldsID="7d66e34a69efbc1f01a67fcf9f1d58c2" ns2:_="" ns3:_="">
     <xsd:import namespace="ca649edd-3005-4233-a3e7-8a8d225fe916"/>
@@ -15933,17 +15986,6 @@
 </ct:contentTypeSchema>
 </file>
 
-<file path=customXml/item2.xml><?xml version="1.0" encoding="utf-8"?>
-<p:properties xmlns:p="http://schemas.microsoft.com/office/2006/metadata/properties" xmlns:xsi="http://www.w3.org/2001/XMLSchema-instance" xmlns:pc="http://schemas.microsoft.com/office/infopath/2007/PartnerControls">
-  <documentManagement>
-    <TaxCatchAll xmlns="ca649edd-3005-4233-a3e7-8a8d225fe916" xsi:nil="true"/>
-    <lcf76f155ced4ddcb4097134ff3c332f xmlns="5716c540-f2cb-4866-ac44-22c3da4c8498">
-      <Terms xmlns="http://schemas.microsoft.com/office/infopath/2007/PartnerControls"/>
-    </lcf76f155ced4ddcb4097134ff3c332f>
-  </documentManagement>
-</p:properties>
-</file>
-
 <file path=customXml/item3.xml><?xml version="1.0" encoding="utf-8"?>
 <?mso-contentType ?>
 <FormTemplates xmlns="http://schemas.microsoft.com/sharepoint/v3/contenttype/forms">
@@ -15954,6 +15996,23 @@
 </file>
 
 <file path=customXml/itemProps1.xml><?xml version="1.0" encoding="utf-8"?>
+<ds:datastoreItem xmlns:ds="http://schemas.openxmlformats.org/officeDocument/2006/customXml" ds:itemID="{D7B3771F-02E9-4BEE-AE04-07949018D5BF}">
+  <ds:schemaRefs>
+    <ds:schemaRef ds:uri="5716c540-f2cb-4866-ac44-22c3da4c8498"/>
+    <ds:schemaRef ds:uri="ca649edd-3005-4233-a3e7-8a8d225fe916"/>
+    <ds:schemaRef ds:uri="http://purl.org/dc/dcmitype/"/>
+    <ds:schemaRef ds:uri="http://purl.org/dc/elements/1.1/"/>
+    <ds:schemaRef ds:uri="http://purl.org/dc/terms/"/>
+    <ds:schemaRef ds:uri="http://schemas.microsoft.com/office/2006/documentManagement/types"/>
+    <ds:schemaRef ds:uri="http://schemas.microsoft.com/office/2006/metadata/properties"/>
+    <ds:schemaRef ds:uri="http://schemas.microsoft.com/office/infopath/2007/PartnerControls"/>
+    <ds:schemaRef ds:uri="http://schemas.openxmlformats.org/package/2006/metadata/core-properties"/>
+    <ds:schemaRef ds:uri="http://www.w3.org/XML/1998/namespace"/>
+  </ds:schemaRefs>
+</ds:datastoreItem>
+</file>
+
+<file path=customXml/itemProps2.xml><?xml version="1.0" encoding="utf-8"?>
 <ds:datastoreItem xmlns:ds="http://schemas.openxmlformats.org/officeDocument/2006/customXml" ds:itemID="{B9D37D00-0CCE-41F8-AFAD-3AE3642D5660}">
   <ds:schemaRefs>
     <ds:schemaRef ds:uri="http://schemas.microsoft.com/office/2006/metadata/contentType"/>
@@ -15972,23 +16031,6 @@
 </ds:datastoreItem>
 </file>
 
-<file path=customXml/itemProps2.xml><?xml version="1.0" encoding="utf-8"?>
-<ds:datastoreItem xmlns:ds="http://schemas.openxmlformats.org/officeDocument/2006/customXml" ds:itemID="{D7B3771F-02E9-4BEE-AE04-07949018D5BF}">
-  <ds:schemaRefs>
-    <ds:schemaRef ds:uri="5716c540-f2cb-4866-ac44-22c3da4c8498"/>
-    <ds:schemaRef ds:uri="ca649edd-3005-4233-a3e7-8a8d225fe916"/>
-    <ds:schemaRef ds:uri="http://purl.org/dc/dcmitype/"/>
-    <ds:schemaRef ds:uri="http://purl.org/dc/elements/1.1/"/>
-    <ds:schemaRef ds:uri="http://purl.org/dc/terms/"/>
-    <ds:schemaRef ds:uri="http://schemas.microsoft.com/office/2006/documentManagement/types"/>
-    <ds:schemaRef ds:uri="http://schemas.microsoft.com/office/2006/metadata/properties"/>
-    <ds:schemaRef ds:uri="http://schemas.microsoft.com/office/infopath/2007/PartnerControls"/>
-    <ds:schemaRef ds:uri="http://schemas.openxmlformats.org/package/2006/metadata/core-properties"/>
-    <ds:schemaRef ds:uri="http://www.w3.org/XML/1998/namespace"/>
-  </ds:schemaRefs>
-</ds:datastoreItem>
-</file>
-
 <file path=customXml/itemProps3.xml><?xml version="1.0" encoding="utf-8"?>
 <ds:datastoreItem xmlns:ds="http://schemas.openxmlformats.org/officeDocument/2006/customXml" ds:itemID="{CEED9375-ABFC-47C9-99E2-11F11E7CDC10}">
   <ds:schemaRefs>

--- a/2026-04-14 - PSCustomObject[] vs Hashtables/PowerShell Summit 2026 - PSCustomObjects vs Hashtables.pptx
+++ b/2026-04-14 - PSCustomObject[] vs Hashtables/PowerShell Summit 2026 - PSCustomObjects vs Hashtables.pptx
@@ -247,7 +247,7 @@
           <a:p>
             <a:fld id="{71DD7AA7-6947-46DE-8F8D-972DE75C4888}" type="datetimeFigureOut">
               <a:rPr lang="en-US" smtClean="0"/>
-              <a:t>4/12/2026</a:t>
+              <a:t>4/14/2026</a:t>
             </a:fld>
             <a:endParaRPr lang="en-US"/>
           </a:p>
@@ -13906,17 +13906,6 @@
                   <a:schemeClr val="tx1"/>
                 </a:solidFill>
               </a:rPr>
-              <a:t>Cadillac of a son-in-law</a:t>
-            </a:r>
-          </a:p>
-          <a:p>
-            <a:pPr lvl="1"/>
-            <a:r>
-              <a:rPr lang="en-US" sz="2800" dirty="0">
-                <a:solidFill>
-                  <a:schemeClr val="tx1"/>
-                </a:solidFill>
-              </a:rPr>
               <a:t>Eugene, OR USA</a:t>
             </a:r>
           </a:p>
@@ -13929,6 +13918,17 @@
                 </a:solidFill>
               </a:rPr>
               <a:t>4 kids, 2 dogs, 1 wife</a:t>
+            </a:r>
+          </a:p>
+          <a:p>
+            <a:pPr lvl="1"/>
+            <a:r>
+              <a:rPr lang="en-US" sz="2800" dirty="0">
+                <a:solidFill>
+                  <a:schemeClr val="tx1"/>
+                </a:solidFill>
+              </a:rPr>
+              <a:t>Cadillac of a son-in-law</a:t>
             </a:r>
           </a:p>
           <a:p>
@@ -14069,315 +14069,6 @@
   <p:clrMapOvr>
     <a:masterClrMapping/>
   </p:clrMapOvr>
-  <p:timing>
-    <p:tnLst>
-      <p:par>
-        <p:cTn id="1" dur="indefinite" restart="never" nodeType="tmRoot">
-          <p:childTnLst>
-            <p:seq concurrent="1" nextAc="seek">
-              <p:cTn id="2" dur="indefinite" nodeType="mainSeq">
-                <p:childTnLst>
-                  <p:par>
-                    <p:cTn id="3" fill="hold">
-                      <p:stCondLst>
-                        <p:cond delay="indefinite"/>
-                      </p:stCondLst>
-                      <p:childTnLst>
-                        <p:par>
-                          <p:cTn id="4" fill="hold">
-                            <p:stCondLst>
-                              <p:cond delay="0"/>
-                            </p:stCondLst>
-                            <p:childTnLst>
-                              <p:par>
-                                <p:cTn id="5" presetID="1" presetClass="entr" presetSubtype="0" fill="hold" grpId="0" nodeType="clickEffect">
-                                  <p:stCondLst>
-                                    <p:cond delay="0"/>
-                                  </p:stCondLst>
-                                  <p:childTnLst>
-                                    <p:set>
-                                      <p:cBhvr>
-                                        <p:cTn id="6" dur="1" fill="hold">
-                                          <p:stCondLst>
-                                            <p:cond delay="0"/>
-                                          </p:stCondLst>
-                                        </p:cTn>
-                                        <p:tgtEl>
-                                          <p:spTgt spid="4">
-                                            <p:txEl>
-                                              <p:pRg st="0" end="0"/>
-                                            </p:txEl>
-                                          </p:spTgt>
-                                        </p:tgtEl>
-                                        <p:attrNameLst>
-                                          <p:attrName>style.visibility</p:attrName>
-                                        </p:attrNameLst>
-                                      </p:cBhvr>
-                                      <p:to>
-                                        <p:strVal val="visible"/>
-                                      </p:to>
-                                    </p:set>
-                                  </p:childTnLst>
-                                </p:cTn>
-                              </p:par>
-                            </p:childTnLst>
-                          </p:cTn>
-                        </p:par>
-                      </p:childTnLst>
-                    </p:cTn>
-                  </p:par>
-                  <p:par>
-                    <p:cTn id="7" fill="hold">
-                      <p:stCondLst>
-                        <p:cond delay="indefinite"/>
-                      </p:stCondLst>
-                      <p:childTnLst>
-                        <p:par>
-                          <p:cTn id="8" fill="hold">
-                            <p:stCondLst>
-                              <p:cond delay="0"/>
-                            </p:stCondLst>
-                            <p:childTnLst>
-                              <p:par>
-                                <p:cTn id="9" presetID="1" presetClass="entr" presetSubtype="0" fill="hold" grpId="0" nodeType="clickEffect">
-                                  <p:stCondLst>
-                                    <p:cond delay="0"/>
-                                  </p:stCondLst>
-                                  <p:childTnLst>
-                                    <p:set>
-                                      <p:cBhvr>
-                                        <p:cTn id="10" dur="1" fill="hold">
-                                          <p:stCondLst>
-                                            <p:cond delay="0"/>
-                                          </p:stCondLst>
-                                        </p:cTn>
-                                        <p:tgtEl>
-                                          <p:spTgt spid="4">
-                                            <p:txEl>
-                                              <p:pRg st="1" end="1"/>
-                                            </p:txEl>
-                                          </p:spTgt>
-                                        </p:tgtEl>
-                                        <p:attrNameLst>
-                                          <p:attrName>style.visibility</p:attrName>
-                                        </p:attrNameLst>
-                                      </p:cBhvr>
-                                      <p:to>
-                                        <p:strVal val="visible"/>
-                                      </p:to>
-                                    </p:set>
-                                  </p:childTnLst>
-                                </p:cTn>
-                              </p:par>
-                            </p:childTnLst>
-                          </p:cTn>
-                        </p:par>
-                      </p:childTnLst>
-                    </p:cTn>
-                  </p:par>
-                  <p:par>
-                    <p:cTn id="11" fill="hold">
-                      <p:stCondLst>
-                        <p:cond delay="indefinite"/>
-                      </p:stCondLst>
-                      <p:childTnLst>
-                        <p:par>
-                          <p:cTn id="12" fill="hold">
-                            <p:stCondLst>
-                              <p:cond delay="0"/>
-                            </p:stCondLst>
-                            <p:childTnLst>
-                              <p:par>
-                                <p:cTn id="13" presetID="1" presetClass="entr" presetSubtype="0" fill="hold" grpId="0" nodeType="clickEffect">
-                                  <p:stCondLst>
-                                    <p:cond delay="0"/>
-                                  </p:stCondLst>
-                                  <p:childTnLst>
-                                    <p:set>
-                                      <p:cBhvr>
-                                        <p:cTn id="14" dur="1" fill="hold">
-                                          <p:stCondLst>
-                                            <p:cond delay="0"/>
-                                          </p:stCondLst>
-                                        </p:cTn>
-                                        <p:tgtEl>
-                                          <p:spTgt spid="4">
-                                            <p:txEl>
-                                              <p:pRg st="2" end="2"/>
-                                            </p:txEl>
-                                          </p:spTgt>
-                                        </p:tgtEl>
-                                        <p:attrNameLst>
-                                          <p:attrName>style.visibility</p:attrName>
-                                        </p:attrNameLst>
-                                      </p:cBhvr>
-                                      <p:to>
-                                        <p:strVal val="visible"/>
-                                      </p:to>
-                                    </p:set>
-                                  </p:childTnLst>
-                                </p:cTn>
-                              </p:par>
-                            </p:childTnLst>
-                          </p:cTn>
-                        </p:par>
-                      </p:childTnLst>
-                    </p:cTn>
-                  </p:par>
-                  <p:par>
-                    <p:cTn id="15" fill="hold">
-                      <p:stCondLst>
-                        <p:cond delay="indefinite"/>
-                      </p:stCondLst>
-                      <p:childTnLst>
-                        <p:par>
-                          <p:cTn id="16" fill="hold">
-                            <p:stCondLst>
-                              <p:cond delay="0"/>
-                            </p:stCondLst>
-                            <p:childTnLst>
-                              <p:par>
-                                <p:cTn id="17" presetID="1" presetClass="entr" presetSubtype="0" fill="hold" grpId="0" nodeType="clickEffect">
-                                  <p:stCondLst>
-                                    <p:cond delay="0"/>
-                                  </p:stCondLst>
-                                  <p:childTnLst>
-                                    <p:set>
-                                      <p:cBhvr>
-                                        <p:cTn id="18" dur="1" fill="hold">
-                                          <p:stCondLst>
-                                            <p:cond delay="0"/>
-                                          </p:stCondLst>
-                                        </p:cTn>
-                                        <p:tgtEl>
-                                          <p:spTgt spid="4">
-                                            <p:txEl>
-                                              <p:pRg st="3" end="3"/>
-                                            </p:txEl>
-                                          </p:spTgt>
-                                        </p:tgtEl>
-                                        <p:attrNameLst>
-                                          <p:attrName>style.visibility</p:attrName>
-                                        </p:attrNameLst>
-                                      </p:cBhvr>
-                                      <p:to>
-                                        <p:strVal val="visible"/>
-                                      </p:to>
-                                    </p:set>
-                                  </p:childTnLst>
-                                </p:cTn>
-                              </p:par>
-                            </p:childTnLst>
-                          </p:cTn>
-                        </p:par>
-                      </p:childTnLst>
-                    </p:cTn>
-                  </p:par>
-                  <p:par>
-                    <p:cTn id="19" fill="hold">
-                      <p:stCondLst>
-                        <p:cond delay="indefinite"/>
-                      </p:stCondLst>
-                      <p:childTnLst>
-                        <p:par>
-                          <p:cTn id="20" fill="hold">
-                            <p:stCondLst>
-                              <p:cond delay="0"/>
-                            </p:stCondLst>
-                            <p:childTnLst>
-                              <p:par>
-                                <p:cTn id="21" presetID="1" presetClass="entr" presetSubtype="0" fill="hold" grpId="0" nodeType="clickEffect">
-                                  <p:stCondLst>
-                                    <p:cond delay="0"/>
-                                  </p:stCondLst>
-                                  <p:childTnLst>
-                                    <p:set>
-                                      <p:cBhvr>
-                                        <p:cTn id="22" dur="1" fill="hold">
-                                          <p:stCondLst>
-                                            <p:cond delay="0"/>
-                                          </p:stCondLst>
-                                        </p:cTn>
-                                        <p:tgtEl>
-                                          <p:spTgt spid="4">
-                                            <p:txEl>
-                                              <p:pRg st="4" end="4"/>
-                                            </p:txEl>
-                                          </p:spTgt>
-                                        </p:tgtEl>
-                                        <p:attrNameLst>
-                                          <p:attrName>style.visibility</p:attrName>
-                                        </p:attrNameLst>
-                                      </p:cBhvr>
-                                      <p:to>
-                                        <p:strVal val="visible"/>
-                                      </p:to>
-                                    </p:set>
-                                  </p:childTnLst>
-                                </p:cTn>
-                              </p:par>
-                              <p:par>
-                                <p:cTn id="23" presetID="1" presetClass="entr" presetSubtype="0" fill="hold" grpId="0" nodeType="withEffect">
-                                  <p:stCondLst>
-                                    <p:cond delay="0"/>
-                                  </p:stCondLst>
-                                  <p:childTnLst>
-                                    <p:set>
-                                      <p:cBhvr>
-                                        <p:cTn id="24" dur="1" fill="hold">
-                                          <p:stCondLst>
-                                            <p:cond delay="0"/>
-                                          </p:stCondLst>
-                                        </p:cTn>
-                                        <p:tgtEl>
-                                          <p:spTgt spid="4">
-                                            <p:txEl>
-                                              <p:pRg st="5" end="5"/>
-                                            </p:txEl>
-                                          </p:spTgt>
-                                        </p:tgtEl>
-                                        <p:attrNameLst>
-                                          <p:attrName>style.visibility</p:attrName>
-                                        </p:attrNameLst>
-                                      </p:cBhvr>
-                                      <p:to>
-                                        <p:strVal val="visible"/>
-                                      </p:to>
-                                    </p:set>
-                                  </p:childTnLst>
-                                </p:cTn>
-                              </p:par>
-                            </p:childTnLst>
-                          </p:cTn>
-                        </p:par>
-                      </p:childTnLst>
-                    </p:cTn>
-                  </p:par>
-                </p:childTnLst>
-              </p:cTn>
-              <p:prevCondLst>
-                <p:cond evt="onPrev" delay="0">
-                  <p:tgtEl>
-                    <p:sldTgt/>
-                  </p:tgtEl>
-                </p:cond>
-              </p:prevCondLst>
-              <p:nextCondLst>
-                <p:cond evt="onNext" delay="0">
-                  <p:tgtEl>
-                    <p:sldTgt/>
-                  </p:tgtEl>
-                </p:cond>
-              </p:nextCondLst>
-            </p:seq>
-          </p:childTnLst>
-        </p:cTn>
-      </p:par>
-    </p:tnLst>
-    <p:bldLst>
-      <p:bldP spid="4" grpId="0" uiExpand="1" build="p"/>
-    </p:bldLst>
-  </p:timing>
 </p:sld>
 </file>
 
@@ -14712,7 +14403,6 @@
             </a:r>
           </a:p>
           <a:p>
-            <a:pPr lvl="1"/>
             <a:r>
               <a:rPr lang="en-US" dirty="0">
                 <a:solidFill>
@@ -14723,7 +14413,7 @@
             </a:r>
           </a:p>
           <a:p>
-            <a:pPr lvl="2"/>
+            <a:pPr lvl="1"/>
             <a:r>
               <a:rPr lang="en-US" dirty="0">
                 <a:solidFill>
@@ -14734,7 +14424,7 @@
             </a:r>
           </a:p>
           <a:p>
-            <a:pPr lvl="2"/>
+            <a:pPr lvl="1"/>
             <a:r>
               <a:rPr lang="en-US" dirty="0">
                 <a:solidFill>
@@ -14745,7 +14435,7 @@
             </a:r>
           </a:p>
           <a:p>
-            <a:pPr lvl="2"/>
+            <a:pPr lvl="1"/>
             <a:r>
               <a:rPr lang="en-US" dirty="0">
                 <a:solidFill>
@@ -15081,7 +14771,7 @@
         <p:spPr>
           <a:xfrm>
             <a:off x="1256361" y="1361260"/>
-            <a:ext cx="10059339" cy="4135480"/>
+            <a:ext cx="10835120" cy="4135480"/>
           </a:xfrm>
         </p:spPr>
         <p:txBody>
@@ -15165,8 +14855,45 @@
                 <a:solidFill>
                   <a:schemeClr val="tx1"/>
                 </a:solidFill>
+                <a:latin typeface="Consolas" panose="020B0609020204030204" pitchFamily="49" charset="0"/>
               </a:rPr>
-              <a:t>Type safety? Don’t need it.</a:t>
+              <a:t>[</a:t>
+            </a:r>
+            <a:r>
+              <a:rPr lang="en-US" dirty="0" err="1">
+                <a:solidFill>
+                  <a:schemeClr val="tx1"/>
+                </a:solidFill>
+                <a:latin typeface="Consolas" panose="020B0609020204030204" pitchFamily="49" charset="0"/>
+              </a:rPr>
+              <a:t>System.Collections.Generic.Dictionary</a:t>
+            </a:r>
+            <a:r>
+              <a:rPr lang="en-US" dirty="0">
+                <a:solidFill>
+                  <a:schemeClr val="tx1"/>
+                </a:solidFill>
+                <a:latin typeface="Consolas" panose="020B0609020204030204" pitchFamily="49" charset="0"/>
+              </a:rPr>
+              <a:t>[</a:t>
+            </a:r>
+            <a:r>
+              <a:rPr lang="en-US" dirty="0" err="1">
+                <a:solidFill>
+                  <a:schemeClr val="tx1"/>
+                </a:solidFill>
+                <a:latin typeface="Consolas" panose="020B0609020204030204" pitchFamily="49" charset="0"/>
+              </a:rPr>
+              <a:t>System.Object,System.Object</a:t>
+            </a:r>
+            <a:r>
+              <a:rPr lang="en-US" dirty="0">
+                <a:solidFill>
+                  <a:schemeClr val="tx1"/>
+                </a:solidFill>
+                <a:latin typeface="Consolas" panose="020B0609020204030204" pitchFamily="49" charset="0"/>
+              </a:rPr>
+              <a:t>]]</a:t>
             </a:r>
           </a:p>
           <a:p>
@@ -15727,17 +15454,6 @@
 </file>
 
 <file path=customXml/item1.xml><?xml version="1.0" encoding="utf-8"?>
-<p:properties xmlns:p="http://schemas.microsoft.com/office/2006/metadata/properties" xmlns:xsi="http://www.w3.org/2001/XMLSchema-instance" xmlns:pc="http://schemas.microsoft.com/office/infopath/2007/PartnerControls">
-  <documentManagement>
-    <TaxCatchAll xmlns="ca649edd-3005-4233-a3e7-8a8d225fe916" xsi:nil="true"/>
-    <lcf76f155ced4ddcb4097134ff3c332f xmlns="5716c540-f2cb-4866-ac44-22c3da4c8498">
-      <Terms xmlns="http://schemas.microsoft.com/office/infopath/2007/PartnerControls"/>
-    </lcf76f155ced4ddcb4097134ff3c332f>
-  </documentManagement>
-</p:properties>
-</file>
-
-<file path=customXml/item2.xml><?xml version="1.0" encoding="utf-8"?>
 <ct:contentTypeSchema xmlns:ct="http://schemas.microsoft.com/office/2006/metadata/contentType" xmlns:ma="http://schemas.microsoft.com/office/2006/metadata/properties/metaAttributes" ct:_="" ma:_="" ma:contentTypeName="Document" ma:contentTypeID="0x010100C0898A77C9D58B48B3D389FB6B71E66B" ma:contentTypeVersion="17" ma:contentTypeDescription="Create a new document." ma:contentTypeScope="" ma:versionID="efacb11f427cb0a88b245a21667b355e">
   <xsd:schema xmlns:xsd="http://www.w3.org/2001/XMLSchema" xmlns:xs="http://www.w3.org/2001/XMLSchema" xmlns:p="http://schemas.microsoft.com/office/2006/metadata/properties" xmlns:ns2="ca649edd-3005-4233-a3e7-8a8d225fe916" xmlns:ns3="5716c540-f2cb-4866-ac44-22c3da4c8498" targetNamespace="http://schemas.microsoft.com/office/2006/metadata/properties" ma:root="true" ma:fieldsID="7d66e34a69efbc1f01a67fcf9f1d58c2" ns2:_="" ns3:_="">
     <xsd:import namespace="ca649edd-3005-4233-a3e7-8a8d225fe916"/>
@@ -15986,6 +15702,17 @@
 </ct:contentTypeSchema>
 </file>
 
+<file path=customXml/item2.xml><?xml version="1.0" encoding="utf-8"?>
+<p:properties xmlns:p="http://schemas.microsoft.com/office/2006/metadata/properties" xmlns:xsi="http://www.w3.org/2001/XMLSchema-instance" xmlns:pc="http://schemas.microsoft.com/office/infopath/2007/PartnerControls">
+  <documentManagement>
+    <TaxCatchAll xmlns="ca649edd-3005-4233-a3e7-8a8d225fe916" xsi:nil="true"/>
+    <lcf76f155ced4ddcb4097134ff3c332f xmlns="5716c540-f2cb-4866-ac44-22c3da4c8498">
+      <Terms xmlns="http://schemas.microsoft.com/office/infopath/2007/PartnerControls"/>
+    </lcf76f155ced4ddcb4097134ff3c332f>
+  </documentManagement>
+</p:properties>
+</file>
+
 <file path=customXml/item3.xml><?xml version="1.0" encoding="utf-8"?>
 <?mso-contentType ?>
 <FormTemplates xmlns="http://schemas.microsoft.com/sharepoint/v3/contenttype/forms">
@@ -15996,23 +15723,6 @@
 </file>
 
 <file path=customXml/itemProps1.xml><?xml version="1.0" encoding="utf-8"?>
-<ds:datastoreItem xmlns:ds="http://schemas.openxmlformats.org/officeDocument/2006/customXml" ds:itemID="{D7B3771F-02E9-4BEE-AE04-07949018D5BF}">
-  <ds:schemaRefs>
-    <ds:schemaRef ds:uri="5716c540-f2cb-4866-ac44-22c3da4c8498"/>
-    <ds:schemaRef ds:uri="ca649edd-3005-4233-a3e7-8a8d225fe916"/>
-    <ds:schemaRef ds:uri="http://purl.org/dc/dcmitype/"/>
-    <ds:schemaRef ds:uri="http://purl.org/dc/elements/1.1/"/>
-    <ds:schemaRef ds:uri="http://purl.org/dc/terms/"/>
-    <ds:schemaRef ds:uri="http://schemas.microsoft.com/office/2006/documentManagement/types"/>
-    <ds:schemaRef ds:uri="http://schemas.microsoft.com/office/2006/metadata/properties"/>
-    <ds:schemaRef ds:uri="http://schemas.microsoft.com/office/infopath/2007/PartnerControls"/>
-    <ds:schemaRef ds:uri="http://schemas.openxmlformats.org/package/2006/metadata/core-properties"/>
-    <ds:schemaRef ds:uri="http://www.w3.org/XML/1998/namespace"/>
-  </ds:schemaRefs>
-</ds:datastoreItem>
-</file>
-
-<file path=customXml/itemProps2.xml><?xml version="1.0" encoding="utf-8"?>
 <ds:datastoreItem xmlns:ds="http://schemas.openxmlformats.org/officeDocument/2006/customXml" ds:itemID="{B9D37D00-0CCE-41F8-AFAD-3AE3642D5660}">
   <ds:schemaRefs>
     <ds:schemaRef ds:uri="http://schemas.microsoft.com/office/2006/metadata/contentType"/>
@@ -16031,6 +15741,23 @@
 </ds:datastoreItem>
 </file>
 
+<file path=customXml/itemProps2.xml><?xml version="1.0" encoding="utf-8"?>
+<ds:datastoreItem xmlns:ds="http://schemas.openxmlformats.org/officeDocument/2006/customXml" ds:itemID="{D7B3771F-02E9-4BEE-AE04-07949018D5BF}">
+  <ds:schemaRefs>
+    <ds:schemaRef ds:uri="5716c540-f2cb-4866-ac44-22c3da4c8498"/>
+    <ds:schemaRef ds:uri="ca649edd-3005-4233-a3e7-8a8d225fe916"/>
+    <ds:schemaRef ds:uri="http://purl.org/dc/dcmitype/"/>
+    <ds:schemaRef ds:uri="http://purl.org/dc/elements/1.1/"/>
+    <ds:schemaRef ds:uri="http://purl.org/dc/terms/"/>
+    <ds:schemaRef ds:uri="http://schemas.microsoft.com/office/2006/documentManagement/types"/>
+    <ds:schemaRef ds:uri="http://schemas.microsoft.com/office/2006/metadata/properties"/>
+    <ds:schemaRef ds:uri="http://schemas.microsoft.com/office/infopath/2007/PartnerControls"/>
+    <ds:schemaRef ds:uri="http://schemas.openxmlformats.org/package/2006/metadata/core-properties"/>
+    <ds:schemaRef ds:uri="http://www.w3.org/XML/1998/namespace"/>
+  </ds:schemaRefs>
+</ds:datastoreItem>
+</file>
+
 <file path=customXml/itemProps3.xml><?xml version="1.0" encoding="utf-8"?>
 <ds:datastoreItem xmlns:ds="http://schemas.openxmlformats.org/officeDocument/2006/customXml" ds:itemID="{CEED9375-ABFC-47C9-99E2-11F11E7CDC10}">
   <ds:schemaRefs>
